--- a/public/study/cse513/downloads/week-04.pptx
+++ b/public/study/cse513/downloads/week-04.pptx
@@ -2319,7 +2319,7 @@
           </a:p>
           <a:p xmlns:a="http://schemas.openxmlformats.org/drawingml/2006/main">
             <a:r>
-              <a:t>P0’a unsafe grant yaptığımız state’te process’ler henüz başka kaynak istemeden hesaplama yapıyor olabilir. Hatta gerçek ihtiyaçları Max’ten düşük kalıp bitirebilirler. Safety testi tüm ilan edilmiş en kötü talepler için tamamlama garantisi arar. Bulamaması mevcut deadlock saptamak değildir. Ancak bu unsafe state’te bütün process’ler kalan ihtiyaçlarını bırakmadan beklerse deadlock mümkün olur. Avoidance bilinmeyen gelecek karşısında muhafazakâr davranır.</a:t>
+              <a:t>P0’a unsafe grant yaptığımız state’te process’ler henüz başka kaynak istemeden hesaplama yapıyor olabilir. Hatta gerçek ihtiyaçları Max’ten düşük kalıp bitirebilirler. Safety testi tüm ilan edilmiş en kötü talepler için tamamlama garantisi arar. Bulamaması mevcut deadlock saptamak değildir. Ancak bu unsafe state’te bütün process’ler ellerindeki kaynakları bırakmadan kalan ihtiyaçlarını beklerse deadlock mümkün olur. Avoidance bilinmeyen gelecek karşısında muhafazakâr davranır.</a:t>
             </a:r>
           </a:p>
           <a:p xmlns:a="http://schemas.openxmlformats.org/drawingml/2006/main">
@@ -3204,7 +3204,7 @@
           </a:p>
           <a:p xmlns:a="http://schemas.openxmlformats.org/drawingml/2006/main">
             <a:r>
-              <a:t>SORUNUN YANITI: 1 Hayır. 2 Hayır. 3 Circular wait. 4 Hayır; livelock/starvation mümkün. 5 Hayır. 6 Hayır; Banker kalan Max, detection mevcut outstanding Request kullanır.</a:t>
+              <a:t>SORUNUN YANITI: 1 Hayır. 2 Hayır. 3 Circular wait. 4 Hayır; livelock/starvation mümkün. 5 Hayır. 6 Hayır; Banker, Need = Max − Allocation vektörünü; detection, mevcut outstanding Request vektörünü kullanır.</a:t>
             </a:r>
           </a:p>
           <a:p xmlns:a="http://schemas.openxmlformats.org/drawingml/2006/main">
